--- a/class/cloud_infra_mgmt/14주차_통합실습2/01_강의자료/3차시_자가치유라이브검증과전체회고.pptx
+++ b/class/cloud_infra_mgmt/14주차_통합실습2/01_강의자료/3차시_자가치유라이브검증과전체회고.pptx
@@ -9464,7 +9464,7 @@
               </a:lnSpc>
             </a:pPr>
             <a:r>
-              <a:rPr sz="1500" b="1">
+              <a:rPr sz="1700" b="1">
                 <a:solidFill>
                   <a:srgbClr val="0D9488"/>
                 </a:solidFill>
@@ -9473,7 +9473,7 @@
               <a:t>●  </a:t>
             </a:r>
             <a:r>
-              <a:rPr sz="1500" b="0">
+              <a:rPr sz="1700" b="0">
                 <a:solidFill>
                   <a:srgbClr val="222733"/>
                 </a:solidFill>
@@ -9489,7 +9489,7 @@
               </a:lnSpc>
             </a:pPr>
             <a:r>
-              <a:rPr sz="1500" b="1">
+              <a:rPr sz="1700" b="1">
                 <a:solidFill>
                   <a:srgbClr val="0D9488"/>
                 </a:solidFill>
@@ -9498,7 +9498,7 @@
               <a:t>●  </a:t>
             </a:r>
             <a:r>
-              <a:rPr sz="1500" b="0">
+              <a:rPr sz="1700" b="0">
                 <a:solidFill>
                   <a:srgbClr val="222733"/>
                 </a:solidFill>
@@ -9514,7 +9514,7 @@
               </a:lnSpc>
             </a:pPr>
             <a:r>
-              <a:rPr sz="1500" b="1">
+              <a:rPr sz="1700" b="1">
                 <a:solidFill>
                   <a:srgbClr val="0D9488"/>
                 </a:solidFill>
@@ -9523,7 +9523,7 @@
               <a:t>●  </a:t>
             </a:r>
             <a:r>
-              <a:rPr sz="1500" b="0">
+              <a:rPr sz="1700" b="0">
                 <a:solidFill>
                   <a:srgbClr val="222733"/>
                 </a:solidFill>

--- a/class/cloud_infra_mgmt/14주차_통합실습2/01_강의자료/3차시_자가치유라이브검증과전체회고.pptx
+++ b/class/cloud_infra_mgmt/14주차_통합실습2/01_강의자료/3차시_자가치유라이브검증과전체회고.pptx
@@ -8131,16 +8131,60 @@
       </p:sp>
       <p:sp>
         <p:nvSpPr>
-          <p:cNvPr id="7" name="Isosceles Triangle 6"/>
+          <p:cNvPr id="7" name="Rectangle 6"/>
           <p:cNvSpPr/>
           <p:nvPr/>
         </p:nvSpPr>
         <p:spPr>
-          <a:xfrm rot="5400000">
-            <a:off x="4423409" y="1673352"/>
-            <a:ext cx="146304" cy="146304"/>
-          </a:xfrm>
-          <a:prstGeom prst="triangle">
+          <a:xfrm>
+            <a:off x="6359651" y="1730959"/>
+            <a:ext cx="2665476" cy="31089"/>
+          </a:xfrm>
+          <a:prstGeom prst="rect">
+            <a:avLst/>
+          </a:prstGeom>
+          <a:solidFill>
+            <a:srgbClr val="14B8A6"/>
+          </a:solidFill>
+          <a:ln>
+            <a:noFill/>
+          </a:ln>
+          <a:effectLst/>
+        </p:spPr>
+        <p:style>
+          <a:lnRef idx="1">
+            <a:schemeClr val="accent1"/>
+          </a:lnRef>
+          <a:fillRef idx="3">
+            <a:schemeClr val="accent1"/>
+          </a:fillRef>
+          <a:effectRef idx="2">
+            <a:schemeClr val="accent1"/>
+          </a:effectRef>
+          <a:fontRef idx="minor">
+            <a:schemeClr val="lt1"/>
+          </a:fontRef>
+        </p:style>
+        <p:txBody>
+          <a:bodyPr rtlCol="0" anchor="ctr"/>
+          <a:lstStyle/>
+          <a:p>
+            <a:pPr algn="ctr"/>
+          </a:p>
+        </p:txBody>
+      </p:sp>
+      <p:sp>
+        <p:nvSpPr>
+          <p:cNvPr id="8" name="Oval 7"/>
+          <p:cNvSpPr/>
+          <p:nvPr/>
+        </p:nvSpPr>
+        <p:spPr>
+          <a:xfrm>
+            <a:off x="2633472" y="1481328"/>
+            <a:ext cx="530352" cy="530352"/>
+          </a:xfrm>
+          <a:prstGeom prst="ellipse">
             <a:avLst/>
           </a:prstGeom>
           <a:solidFill>
@@ -8175,139 +8219,7 @@
       </p:sp>
       <p:sp>
         <p:nvSpPr>
-          <p:cNvPr id="8" name="Rectangle 7"/>
-          <p:cNvSpPr/>
-          <p:nvPr/>
-        </p:nvSpPr>
-        <p:spPr>
-          <a:xfrm>
-            <a:off x="6359651" y="1730959"/>
-            <a:ext cx="2665476" cy="31089"/>
-          </a:xfrm>
-          <a:prstGeom prst="rect">
-            <a:avLst/>
-          </a:prstGeom>
-          <a:solidFill>
-            <a:srgbClr val="14B8A6"/>
-          </a:solidFill>
-          <a:ln>
-            <a:noFill/>
-          </a:ln>
-          <a:effectLst/>
-        </p:spPr>
-        <p:style>
-          <a:lnRef idx="1">
-            <a:schemeClr val="accent1"/>
-          </a:lnRef>
-          <a:fillRef idx="3">
-            <a:schemeClr val="accent1"/>
-          </a:fillRef>
-          <a:effectRef idx="2">
-            <a:schemeClr val="accent1"/>
-          </a:effectRef>
-          <a:fontRef idx="minor">
-            <a:schemeClr val="lt1"/>
-          </a:fontRef>
-        </p:style>
-        <p:txBody>
-          <a:bodyPr rtlCol="0" anchor="ctr"/>
-          <a:lstStyle/>
-          <a:p>
-            <a:pPr algn="ctr"/>
-          </a:p>
-        </p:txBody>
-      </p:sp>
-      <p:sp>
-        <p:nvSpPr>
-          <p:cNvPr id="9" name="Isosceles Triangle 8"/>
-          <p:cNvSpPr/>
-          <p:nvPr/>
-        </p:nvSpPr>
-        <p:spPr>
-          <a:xfrm rot="5400000">
-            <a:off x="7619238" y="1673352"/>
-            <a:ext cx="146304" cy="146304"/>
-          </a:xfrm>
-          <a:prstGeom prst="triangle">
-            <a:avLst/>
-          </a:prstGeom>
-          <a:solidFill>
-            <a:srgbClr val="0D9488"/>
-          </a:solidFill>
-          <a:ln>
-            <a:noFill/>
-          </a:ln>
-          <a:effectLst/>
-        </p:spPr>
-        <p:style>
-          <a:lnRef idx="1">
-            <a:schemeClr val="accent1"/>
-          </a:lnRef>
-          <a:fillRef idx="3">
-            <a:schemeClr val="accent1"/>
-          </a:fillRef>
-          <a:effectRef idx="2">
-            <a:schemeClr val="accent1"/>
-          </a:effectRef>
-          <a:fontRef idx="minor">
-            <a:schemeClr val="lt1"/>
-          </a:fontRef>
-        </p:style>
-        <p:txBody>
-          <a:bodyPr rtlCol="0" anchor="ctr"/>
-          <a:lstStyle/>
-          <a:p>
-            <a:pPr algn="ctr"/>
-          </a:p>
-        </p:txBody>
-      </p:sp>
-      <p:sp>
-        <p:nvSpPr>
-          <p:cNvPr id="10" name="Oval 9"/>
-          <p:cNvSpPr/>
-          <p:nvPr/>
-        </p:nvSpPr>
-        <p:spPr>
-          <a:xfrm>
-            <a:off x="2633472" y="1481328"/>
-            <a:ext cx="530352" cy="530352"/>
-          </a:xfrm>
-          <a:prstGeom prst="ellipse">
-            <a:avLst/>
-          </a:prstGeom>
-          <a:solidFill>
-            <a:srgbClr val="0D9488"/>
-          </a:solidFill>
-          <a:ln>
-            <a:noFill/>
-          </a:ln>
-          <a:effectLst/>
-        </p:spPr>
-        <p:style>
-          <a:lnRef idx="1">
-            <a:schemeClr val="accent1"/>
-          </a:lnRef>
-          <a:fillRef idx="3">
-            <a:schemeClr val="accent1"/>
-          </a:fillRef>
-          <a:effectRef idx="2">
-            <a:schemeClr val="accent1"/>
-          </a:effectRef>
-          <a:fontRef idx="minor">
-            <a:schemeClr val="lt1"/>
-          </a:fontRef>
-        </p:style>
-        <p:txBody>
-          <a:bodyPr rtlCol="0" anchor="ctr"/>
-          <a:lstStyle/>
-          <a:p>
-            <a:pPr algn="ctr"/>
-          </a:p>
-        </p:txBody>
-      </p:sp>
-      <p:sp>
-        <p:nvSpPr>
-          <p:cNvPr id="11" name="TextBox 10"/>
+          <p:cNvPr id="9" name="TextBox 8"/>
           <p:cNvSpPr txBox="1"/>
           <p:nvPr/>
         </p:nvSpPr>
@@ -8342,7 +8254,7 @@
       </p:sp>
       <p:sp>
         <p:nvSpPr>
-          <p:cNvPr id="12" name="Rounded Rectangle 11"/>
+          <p:cNvPr id="10" name="Rounded Rectangle 9"/>
           <p:cNvSpPr/>
           <p:nvPr/>
         </p:nvSpPr>
@@ -8390,7 +8302,7 @@
       </p:sp>
       <p:sp>
         <p:nvSpPr>
-          <p:cNvPr id="13" name="TextBox 12"/>
+          <p:cNvPr id="11" name="TextBox 10"/>
           <p:cNvSpPr txBox="1"/>
           <p:nvPr/>
         </p:nvSpPr>
@@ -8425,7 +8337,7 @@
       </p:sp>
       <p:sp>
         <p:nvSpPr>
-          <p:cNvPr id="14" name="TextBox 13"/>
+          <p:cNvPr id="12" name="TextBox 11"/>
           <p:cNvSpPr txBox="1"/>
           <p:nvPr/>
         </p:nvSpPr>
@@ -8464,7 +8376,7 @@
       </p:sp>
       <p:sp>
         <p:nvSpPr>
-          <p:cNvPr id="15" name="Oval 14"/>
+          <p:cNvPr id="13" name="Oval 12"/>
           <p:cNvSpPr/>
           <p:nvPr/>
         </p:nvSpPr>
@@ -8508,7 +8420,7 @@
       </p:sp>
       <p:sp>
         <p:nvSpPr>
-          <p:cNvPr id="16" name="TextBox 15"/>
+          <p:cNvPr id="14" name="TextBox 13"/>
           <p:cNvSpPr txBox="1"/>
           <p:nvPr/>
         </p:nvSpPr>
@@ -8543,7 +8455,7 @@
       </p:sp>
       <p:sp>
         <p:nvSpPr>
-          <p:cNvPr id="17" name="Rounded Rectangle 16"/>
+          <p:cNvPr id="15" name="Rounded Rectangle 14"/>
           <p:cNvSpPr/>
           <p:nvPr/>
         </p:nvSpPr>
@@ -8591,7 +8503,7 @@
       </p:sp>
       <p:sp>
         <p:nvSpPr>
-          <p:cNvPr id="18" name="TextBox 17"/>
+          <p:cNvPr id="16" name="TextBox 15"/>
           <p:cNvSpPr txBox="1"/>
           <p:nvPr/>
         </p:nvSpPr>
@@ -8626,7 +8538,7 @@
       </p:sp>
       <p:sp>
         <p:nvSpPr>
-          <p:cNvPr id="19" name="TextBox 18"/>
+          <p:cNvPr id="17" name="TextBox 16"/>
           <p:cNvSpPr txBox="1"/>
           <p:nvPr/>
         </p:nvSpPr>
@@ -8665,7 +8577,7 @@
       </p:sp>
       <p:sp>
         <p:nvSpPr>
-          <p:cNvPr id="20" name="Oval 19"/>
+          <p:cNvPr id="18" name="Oval 17"/>
           <p:cNvSpPr/>
           <p:nvPr/>
         </p:nvSpPr>
@@ -8709,7 +8621,7 @@
       </p:sp>
       <p:sp>
         <p:nvSpPr>
-          <p:cNvPr id="21" name="TextBox 20"/>
+          <p:cNvPr id="19" name="TextBox 18"/>
           <p:cNvSpPr txBox="1"/>
           <p:nvPr/>
         </p:nvSpPr>
@@ -8744,7 +8656,7 @@
       </p:sp>
       <p:sp>
         <p:nvSpPr>
-          <p:cNvPr id="22" name="Rounded Rectangle 21"/>
+          <p:cNvPr id="20" name="Rounded Rectangle 19"/>
           <p:cNvSpPr/>
           <p:nvPr/>
         </p:nvSpPr>
@@ -8792,7 +8704,7 @@
       </p:sp>
       <p:sp>
         <p:nvSpPr>
-          <p:cNvPr id="23" name="TextBox 22"/>
+          <p:cNvPr id="21" name="TextBox 20"/>
           <p:cNvSpPr txBox="1"/>
           <p:nvPr/>
         </p:nvSpPr>
@@ -8827,7 +8739,7 @@
       </p:sp>
       <p:sp>
         <p:nvSpPr>
-          <p:cNvPr id="24" name="TextBox 23"/>
+          <p:cNvPr id="22" name="TextBox 21"/>
           <p:cNvSpPr txBox="1"/>
           <p:nvPr/>
         </p:nvSpPr>
@@ -8866,7 +8778,7 @@
       </p:sp>
       <p:sp>
         <p:nvSpPr>
-          <p:cNvPr id="25" name="TextBox 24"/>
+          <p:cNvPr id="23" name="TextBox 22"/>
           <p:cNvSpPr txBox="1"/>
           <p:nvPr/>
         </p:nvSpPr>
@@ -8901,7 +8813,7 @@
       </p:sp>
       <p:sp>
         <p:nvSpPr>
-          <p:cNvPr id="26" name="TextBox 25"/>
+          <p:cNvPr id="24" name="TextBox 23"/>
           <p:cNvSpPr txBox="1"/>
           <p:nvPr/>
         </p:nvSpPr>
@@ -8936,7 +8848,7 @@
       </p:sp>
       <p:sp>
         <p:nvSpPr>
-          <p:cNvPr id="27" name="Rectangle 26"/>
+          <p:cNvPr id="25" name="Rectangle 24"/>
           <p:cNvSpPr/>
           <p:nvPr/>
         </p:nvSpPr>
@@ -9460,7 +9372,7 @@
           <a:p>
             <a:pPr>
               <a:lnSpc>
-                <a:spcPct val="115000"/>
+                <a:spcPct val="149500"/>
               </a:lnSpc>
             </a:pPr>
             <a:r>
@@ -9485,7 +9397,7 @@
           <a:p>
             <a:pPr>
               <a:lnSpc>
-                <a:spcPct val="115000"/>
+                <a:spcPct val="149500"/>
               </a:lnSpc>
             </a:pPr>
             <a:r>
@@ -9510,7 +9422,7 @@
           <a:p>
             <a:pPr>
               <a:lnSpc>
-                <a:spcPct val="115000"/>
+                <a:spcPct val="149500"/>
               </a:lnSpc>
             </a:pPr>
             <a:r>
@@ -10094,7 +10006,7 @@
           <a:p>
             <a:pPr>
               <a:lnSpc>
-                <a:spcPct val="115000"/>
+                <a:spcPct val="149500"/>
               </a:lnSpc>
             </a:pPr>
             <a:r>
@@ -10119,7 +10031,7 @@
           <a:p>
             <a:pPr>
               <a:lnSpc>
-                <a:spcPct val="115000"/>
+                <a:spcPct val="149500"/>
               </a:lnSpc>
             </a:pPr>
             <a:r>
@@ -10144,7 +10056,7 @@
           <a:p>
             <a:pPr>
               <a:lnSpc>
-                <a:spcPct val="115000"/>
+                <a:spcPct val="149500"/>
               </a:lnSpc>
             </a:pPr>
             <a:r>
@@ -10878,7 +10790,7 @@
           <a:p>
             <a:pPr>
               <a:lnSpc>
-                <a:spcPct val="115000"/>
+                <a:spcPct val="149500"/>
               </a:lnSpc>
             </a:pPr>
             <a:r>
@@ -10903,7 +10815,7 @@
           <a:p>
             <a:pPr>
               <a:lnSpc>
-                <a:spcPct val="115000"/>
+                <a:spcPct val="149500"/>
               </a:lnSpc>
             </a:pPr>
             <a:r>
@@ -10928,7 +10840,7 @@
           <a:p>
             <a:pPr>
               <a:lnSpc>
-                <a:spcPct val="115000"/>
+                <a:spcPct val="149500"/>
               </a:lnSpc>
             </a:pPr>
             <a:r>
@@ -10953,7 +10865,7 @@
           <a:p>
             <a:pPr>
               <a:lnSpc>
-                <a:spcPct val="115000"/>
+                <a:spcPct val="149500"/>
               </a:lnSpc>
             </a:pPr>
             <a:r>
@@ -11344,7 +11256,7 @@
           <a:p>
             <a:pPr>
               <a:lnSpc>
-                <a:spcPct val="115000"/>
+                <a:spcPct val="149500"/>
               </a:lnSpc>
             </a:pPr>
             <a:r>
@@ -11369,7 +11281,7 @@
           <a:p>
             <a:pPr>
               <a:lnSpc>
-                <a:spcPct val="115000"/>
+                <a:spcPct val="149500"/>
               </a:lnSpc>
             </a:pPr>
             <a:r>
@@ -11394,7 +11306,7 @@
           <a:p>
             <a:pPr>
               <a:lnSpc>
-                <a:spcPct val="115000"/>
+                <a:spcPct val="149500"/>
               </a:lnSpc>
             </a:pPr>
             <a:r>

--- a/class/cloud_infra_mgmt/14주차_통합실습2/01_강의자료/3차시_자가치유라이브검증과전체회고.pptx
+++ b/class/cloud_infra_mgmt/14주차_통합실습2/01_강의자료/3차시_자가치유라이브검증과전체회고.pptx
@@ -4972,6 +4972,8 @@
                   <a:srgbClr val="14B8A6"/>
                 </a:solidFill>
                 <a:latin typeface="맑은 고딕"/>
+                <a:ea typeface="맑은 고딕"/>
+                <a:cs typeface="맑은 고딕"/>
               </a:rPr>
               <a:t>클라우드인프라관리  ·  14주차 3차시 [VM 전용]</a:t>
             </a:r>
@@ -5007,6 +5009,8 @@
                   <a:srgbClr val="FFFFFF"/>
                 </a:solidFill>
                 <a:latin typeface="맑은 고딕"/>
+                <a:ea typeface="맑은 고딕"/>
+                <a:cs typeface="맑은 고딕"/>
               </a:rPr>
               <a:t>자가치유 라이브 검증과 전체 회고</a:t>
             </a:r>
@@ -5042,6 +5046,8 @@
                   <a:srgbClr val="C9D3E6"/>
                 </a:solidFill>
                 <a:latin typeface="맑은 고딕"/>
+                <a:ea typeface="맑은 고딕"/>
+                <a:cs typeface="맑은 고딕"/>
               </a:rPr>
               <a:t>0주차부터 14주차까지, 우리가 만든 것</a:t>
             </a:r>
@@ -5077,6 +5083,8 @@
                   <a:srgbClr val="FFFFFF"/>
                 </a:solidFill>
                 <a:latin typeface="맑은 고딕"/>
+                <a:ea typeface="맑은 고딕"/>
+                <a:cs typeface="맑은 고딕"/>
               </a:rPr>
               <a:t>영남이공대학교 김지윤교수</a:t>
             </a:r>
@@ -5236,6 +5244,8 @@
                   <a:srgbClr val="14213D"/>
                 </a:solidFill>
                 <a:latin typeface="맑은 고딕"/>
+                <a:ea typeface="맑은 고딕"/>
+                <a:cs typeface="맑은 고딕"/>
               </a:rPr>
               <a:t>03</a:t>
             </a:r>
@@ -5271,6 +5281,8 @@
                   <a:srgbClr val="FFFFFF"/>
                 </a:solidFill>
                 <a:latin typeface="맑은 고딕"/>
+                <a:ea typeface="맑은 고딕"/>
+                <a:cs typeface="맑은 고딕"/>
               </a:rPr>
               <a:t>전체 회고</a:t>
             </a:r>
@@ -5306,6 +5318,8 @@
                   <a:srgbClr val="C9D3E6"/>
                 </a:solidFill>
                 <a:latin typeface="맑은 고딕"/>
+                <a:ea typeface="맑은 고딕"/>
+                <a:cs typeface="맑은 고딕"/>
               </a:rPr>
               <a:t>0주차부터 14주차까지</a:t>
             </a:r>
@@ -5465,6 +5479,8 @@
                   <a:srgbClr val="14213D"/>
                 </a:solidFill>
                 <a:latin typeface="맑은 고딕"/>
+                <a:ea typeface="맑은 고딕"/>
+                <a:cs typeface="맑은 고딕"/>
               </a:rPr>
               <a:t>03</a:t>
             </a:r>
@@ -5500,6 +5516,8 @@
                   <a:srgbClr val="14B8A6"/>
                 </a:solidFill>
                 <a:latin typeface="맑은 고딕"/>
+                <a:ea typeface="맑은 고딕"/>
+                <a:cs typeface="맑은 고딕"/>
               </a:rPr>
               <a:t>PART 3 · 전체 회고</a:t>
             </a:r>
@@ -5535,6 +5553,8 @@
                   <a:srgbClr val="FFFFFF"/>
                 </a:solidFill>
                 <a:latin typeface="맑은 고딕"/>
+                <a:ea typeface="맑은 고딕"/>
+                <a:cs typeface="맑은 고딕"/>
               </a:rPr>
               <a:t>우리가 지나온 5단계</a:t>
             </a:r>
@@ -5614,6 +5634,8 @@
                   <a:srgbClr val="FFFFFF"/>
                 </a:solidFill>
                 <a:latin typeface="맑은 고딕"/>
+                <a:ea typeface="맑은 고딕"/>
+                <a:cs typeface="맑은 고딕"/>
               </a:rPr>
               <a:t>단계</a:t>
             </a:r>
@@ -5693,6 +5715,8 @@
                   <a:srgbClr val="FFFFFF"/>
                 </a:solidFill>
                 <a:latin typeface="맑은 고딕"/>
+                <a:ea typeface="맑은 고딕"/>
+                <a:cs typeface="맑은 고딕"/>
               </a:rPr>
               <a:t>무엇을 배웠나</a:t>
             </a:r>
@@ -5772,6 +5796,8 @@
                   <a:srgbClr val="14213D"/>
                 </a:solidFill>
                 <a:latin typeface="맑은 고딕"/>
+                <a:ea typeface="맑은 고딕"/>
+                <a:cs typeface="맑은 고딕"/>
               </a:rPr>
               <a:t>0단계(0주차)</a:t>
             </a:r>
@@ -5851,6 +5877,8 @@
                   <a:srgbClr val="222733"/>
                 </a:solidFill>
                 <a:latin typeface="맑은 고딕"/>
+                <a:ea typeface="맑은 고딕"/>
+                <a:cs typeface="맑은 고딕"/>
               </a:rPr>
               <a:t>VM 환경 구성 — 실습의 출발점</a:t>
             </a:r>
@@ -5930,6 +5958,8 @@
                   <a:srgbClr val="14213D"/>
                 </a:solidFill>
                 <a:latin typeface="맑은 고딕"/>
+                <a:ea typeface="맑은 고딕"/>
+                <a:cs typeface="맑은 고딕"/>
               </a:rPr>
               <a:t>1단계(1~3주)</a:t>
             </a:r>
@@ -6009,6 +6039,8 @@
                   <a:srgbClr val="222733"/>
                 </a:solidFill>
                 <a:latin typeface="맑은 고딕"/>
+                <a:ea typeface="맑은 고딕"/>
+                <a:cs typeface="맑은 고딕"/>
               </a:rPr>
               <a:t>Docker — 컨테이너로 앱을 포장하는 법</a:t>
             </a:r>
@@ -6088,6 +6120,8 @@
                   <a:srgbClr val="14213D"/>
                 </a:solidFill>
                 <a:latin typeface="맑은 고딕"/>
+                <a:ea typeface="맑은 고딕"/>
+                <a:cs typeface="맑은 고딕"/>
               </a:rPr>
               <a:t>2단계(4~7주)</a:t>
             </a:r>
@@ -6167,6 +6201,8 @@
                   <a:srgbClr val="222733"/>
                 </a:solidFill>
                 <a:latin typeface="맑은 고딕"/>
+                <a:ea typeface="맑은 고딕"/>
+                <a:cs typeface="맑은 고딕"/>
               </a:rPr>
               <a:t>Kubernetes — 컨테이너를 자동으로 운영하는 법</a:t>
             </a:r>
@@ -6246,6 +6282,8 @@
                   <a:srgbClr val="14213D"/>
                 </a:solidFill>
                 <a:latin typeface="맑은 고딕"/>
+                <a:ea typeface="맑은 고딕"/>
+                <a:cs typeface="맑은 고딕"/>
               </a:rPr>
               <a:t>3단계(9~10주)</a:t>
             </a:r>
@@ -6325,6 +6363,8 @@
                   <a:srgbClr val="222733"/>
                 </a:solidFill>
                 <a:latin typeface="맑은 고딕"/>
+                <a:ea typeface="맑은 고딕"/>
+                <a:cs typeface="맑은 고딕"/>
               </a:rPr>
               <a:t>Terraform — 인프라를 코드로 관리하는 법</a:t>
             </a:r>
@@ -6404,6 +6444,8 @@
                   <a:srgbClr val="14213D"/>
                 </a:solidFill>
                 <a:latin typeface="맑은 고딕"/>
+                <a:ea typeface="맑은 고딕"/>
+                <a:cs typeface="맑은 고딕"/>
               </a:rPr>
               <a:t>4단계(11~12주)</a:t>
             </a:r>
@@ -6483,6 +6525,8 @@
                   <a:srgbClr val="222733"/>
                 </a:solidFill>
                 <a:latin typeface="맑은 고딕"/>
+                <a:ea typeface="맑은 고딕"/>
+                <a:cs typeface="맑은 고딕"/>
               </a:rPr>
               <a:t>Jenkins — 빌드·배포를 자동화하는 법</a:t>
             </a:r>
@@ -6562,6 +6606,8 @@
                   <a:srgbClr val="14213D"/>
                 </a:solidFill>
                 <a:latin typeface="맑은 고딕"/>
+                <a:ea typeface="맑은 고딕"/>
+                <a:cs typeface="맑은 고딕"/>
               </a:rPr>
               <a:t>5단계(13~14주)</a:t>
             </a:r>
@@ -6641,6 +6687,8 @@
                   <a:srgbClr val="222733"/>
                 </a:solidFill>
                 <a:latin typeface="맑은 고딕"/>
+                <a:ea typeface="맑은 고딕"/>
+                <a:cs typeface="맑은 고딕"/>
               </a:rPr>
               <a:t>전체 통합 — 위 모든 것을 하나의 파이프라인으로</a:t>
             </a:r>
@@ -6676,6 +6724,8 @@
                   <a:srgbClr val="5B6373"/>
                 </a:solidFill>
                 <a:latin typeface="맑은 고딕"/>
+                <a:ea typeface="맑은 고딕"/>
+                <a:cs typeface="맑은 고딕"/>
               </a:rPr>
               <a:t>클라우드인프라관리  ·  14주차 3차시 [VM 전용]</a:t>
             </a:r>
@@ -6711,6 +6761,8 @@
                   <a:srgbClr val="5B6373"/>
                 </a:solidFill>
                 <a:latin typeface="맑은 고딕"/>
+                <a:ea typeface="맑은 고딕"/>
+                <a:cs typeface="맑은 고딕"/>
               </a:rPr>
               <a:t>11 / 13</a:t>
             </a:r>
@@ -6896,6 +6948,8 @@
                   <a:srgbClr val="FFFFFF"/>
                 </a:solidFill>
                 <a:latin typeface="맑은 고딕"/>
+                <a:ea typeface="맑은 고딕"/>
+                <a:cs typeface="맑은 고딕"/>
               </a:rPr>
               <a:t>오늘의 정리</a:t>
             </a:r>
@@ -6949,6 +7003,8 @@
                   <a:srgbClr val="14213D"/>
                 </a:solidFill>
                 <a:latin typeface="맑은 고딕"/>
+                <a:ea typeface="맑은 고딕"/>
+                <a:cs typeface="맑은 고딕"/>
               </a:rPr>
               <a:t>1</a:t>
             </a:r>
@@ -6984,6 +7040,8 @@
                   <a:srgbClr val="FFFFFF"/>
                 </a:solidFill>
                 <a:latin typeface="맑은 고딕"/>
+                <a:ea typeface="맑은 고딕"/>
+                <a:cs typeface="맑은 고딕"/>
               </a:rPr>
               <a:t>HPA(확장)와 자가치유(복구)가 함께 동작해, 트래픽 폭주와 장애 모두에서 서비스가 스스로 살아남는 고가용성을 이룬다</a:t>
             </a:r>
@@ -7037,6 +7095,8 @@
                   <a:srgbClr val="14213D"/>
                 </a:solidFill>
                 <a:latin typeface="맑은 고딕"/>
+                <a:ea typeface="맑은 고딕"/>
+                <a:cs typeface="맑은 고딕"/>
               </a:rPr>
               <a:t>2</a:t>
             </a:r>
@@ -7072,6 +7132,8 @@
                   <a:srgbClr val="FFFFFF"/>
                 </a:solidFill>
                 <a:latin typeface="맑은 고딕"/>
+                <a:ea typeface="맑은 고딕"/>
+                <a:cs typeface="맑은 고딕"/>
               </a:rPr>
               <a:t>0주차부터 14주차까지, 우리는 하나의 서비스를 만들고, 운영하고, 자동화하고, 견고하게 만드는 전 과정을 직접 경험했다</a:t>
             </a:r>
@@ -7213,6 +7275,8 @@
                   <a:srgbClr val="FFFFFF"/>
                 </a:solidFill>
                 <a:latin typeface="맑은 고딕"/>
+                <a:ea typeface="맑은 고딕"/>
+                <a:cs typeface="맑은 고딕"/>
               </a:rPr>
               <a:t>다음 주 예고</a:t>
             </a:r>
@@ -7248,6 +7312,8 @@
                   <a:srgbClr val="14B8A6"/>
                 </a:solidFill>
                 <a:latin typeface="맑은 고딕"/>
+                <a:ea typeface="맑은 고딕"/>
+                <a:cs typeface="맑은 고딕"/>
               </a:rPr>
               <a:t>다음 차시 예고 — 15주차 — 기말고사</a:t>
             </a:r>
@@ -7283,6 +7349,8 @@
                   <a:srgbClr val="FFFFFF"/>
                 </a:solidFill>
                 <a:latin typeface="맑은 고딕"/>
+                <a:ea typeface="맑은 고딕"/>
+                <a:cs typeface="맑은 고딕"/>
               </a:rPr>
               <a:t>9~12주차 Terraform·Jenkins를 복습하고, 13~14주차 통합실습을 최종 점검한 뒤, 전체 파이프라인 아키텍처를 설계·분석하는 기말고사를 치릅니다.</a:t>
             </a:r>
@@ -7468,6 +7536,8 @@
                   <a:srgbClr val="14B8A6"/>
                 </a:solidFill>
                 <a:latin typeface="맑은 고딕"/>
+                <a:ea typeface="맑은 고딕"/>
+                <a:cs typeface="맑은 고딕"/>
               </a:rPr>
               <a:t>14주차, 그리고 한 학기 실습 여정을 마치며</a:t>
             </a:r>
@@ -7503,6 +7573,8 @@
                   <a:srgbClr val="FFFFFF"/>
                 </a:solidFill>
                 <a:latin typeface="맑은 고딕"/>
+                <a:ea typeface="맑은 고딕"/>
+                <a:cs typeface="맑은 고딕"/>
               </a:rPr>
               <a:t>수고하셨습니다!</a:t>
             </a:r>
@@ -7542,6 +7614,8 @@
                   <a:srgbClr val="C9D3E6"/>
                 </a:solidFill>
                 <a:latin typeface="맑은 고딕"/>
+                <a:ea typeface="맑은 고딕"/>
+                <a:cs typeface="맑은 고딕"/>
               </a:rPr>
               <a:t>0주차부터 오늘까지, Docker·Kubernetes·Terraform·Jenkins를 모두 직접 손으로 다뤄보셨습니다. 다음 주 기말고사 준비 잘 하시고, 마지막까지 힘내세요!</a:t>
             </a:r>
@@ -7683,6 +7757,8 @@
                   <a:srgbClr val="14B8A6"/>
                 </a:solidFill>
                 <a:latin typeface="맑은 고딕"/>
+                <a:ea typeface="맑은 고딕"/>
+                <a:cs typeface="맑은 고딕"/>
               </a:rPr>
               <a:t>SESSION OVERVIEW</a:t>
             </a:r>
@@ -7718,6 +7794,8 @@
                   <a:srgbClr val="FFFFFF"/>
                 </a:solidFill>
                 <a:latin typeface="맑은 고딕"/>
+                <a:ea typeface="맑은 고딕"/>
+                <a:cs typeface="맑은 고딕"/>
               </a:rPr>
               <a:t>오늘의 학습 목표</a:t>
             </a:r>
@@ -7757,6 +7835,8 @@
                   <a:srgbClr val="222733"/>
                 </a:solidFill>
                 <a:latin typeface="맑은 고딕"/>
+                <a:ea typeface="맑은 고딕"/>
+                <a:cs typeface="맑은 고딕"/>
               </a:rPr>
               <a:t>1.  부하가 걸린 상태에서 Pod를 강제로 삭제해 자가치유를 라이브로 검증한다</a:t>
             </a:r>
@@ -7773,6 +7853,8 @@
                   <a:srgbClr val="222733"/>
                 </a:solidFill>
                 <a:latin typeface="맑은 고딕"/>
+                <a:ea typeface="맑은 고딕"/>
+                <a:cs typeface="맑은 고딕"/>
               </a:rPr>
               <a:t>2.  HPA(확장)와 자가치유(복구)가 함께 동작해 고가용성을 이루는 원리를 정리한다</a:t>
             </a:r>
@@ -7789,6 +7871,8 @@
                   <a:srgbClr val="222733"/>
                 </a:solidFill>
                 <a:latin typeface="맑은 고딕"/>
+                <a:ea typeface="맑은 고딕"/>
+                <a:cs typeface="맑은 고딕"/>
               </a:rPr>
               <a:t>3.  0~14주차 전체 여정을 되짚어보며 배운 것을 회고한다</a:t>
             </a:r>
@@ -7824,6 +7908,8 @@
                   <a:srgbClr val="5B6373"/>
                 </a:solidFill>
                 <a:latin typeface="맑은 고딕"/>
+                <a:ea typeface="맑은 고딕"/>
+                <a:cs typeface="맑은 고딕"/>
               </a:rPr>
               <a:t>클라우드인프라관리  ·  14주차 3차시 [VM 전용]</a:t>
             </a:r>
@@ -7859,6 +7945,8 @@
                   <a:srgbClr val="5B6373"/>
                 </a:solidFill>
                 <a:latin typeface="맑은 고딕"/>
+                <a:ea typeface="맑은 고딕"/>
+                <a:cs typeface="맑은 고딕"/>
               </a:rPr>
               <a:t>02 / 13</a:t>
             </a:r>
@@ -8044,6 +8132,8 @@
                   <a:srgbClr val="14B8A6"/>
                 </a:solidFill>
                 <a:latin typeface="맑은 고딕"/>
+                <a:ea typeface="맑은 고딕"/>
+                <a:cs typeface="맑은 고딕"/>
               </a:rPr>
               <a:t>SESSION OVERVIEW</a:t>
             </a:r>
@@ -8079,6 +8169,8 @@
                   <a:srgbClr val="FFFFFF"/>
                 </a:solidFill>
                 <a:latin typeface="맑은 고딕"/>
+                <a:ea typeface="맑은 고딕"/>
+                <a:cs typeface="맑은 고딕"/>
               </a:rPr>
               <a:t>오늘의 진행 순서 (Killercoda 없음)</a:t>
             </a:r>
@@ -8246,6 +8338,8 @@
                   <a:srgbClr val="FFFFFF"/>
                 </a:solidFill>
                 <a:latin typeface="맑은 고딕"/>
+                <a:ea typeface="맑은 고딕"/>
+                <a:cs typeface="맑은 고딕"/>
               </a:rPr>
               <a:t>1</a:t>
             </a:r>
@@ -8329,6 +8423,8 @@
                   <a:srgbClr val="14213D"/>
                 </a:solidFill>
                 <a:latin typeface="맑은 고딕"/>
+                <a:ea typeface="맑은 고딕"/>
+                <a:cs typeface="맑은 고딕"/>
               </a:rPr>
               <a:t>개념 설명</a:t>
             </a:r>
@@ -8368,6 +8464,8 @@
                   <a:srgbClr val="222733"/>
                 </a:solidFill>
                 <a:latin typeface="맑은 고딕"/>
+                <a:ea typeface="맑은 고딕"/>
+                <a:cs typeface="맑은 고딕"/>
               </a:rPr>
               <a:t>고가용성 정리</a:t>
             </a:r>
@@ -8447,6 +8545,8 @@
                   <a:srgbClr val="FFFFFF"/>
                 </a:solidFill>
                 <a:latin typeface="맑은 고딕"/>
+                <a:ea typeface="맑은 고딕"/>
+                <a:cs typeface="맑은 고딕"/>
               </a:rPr>
               <a:t>2</a:t>
             </a:r>
@@ -8530,6 +8630,8 @@
                   <a:srgbClr val="14213D"/>
                 </a:solidFill>
                 <a:latin typeface="맑은 고딕"/>
+                <a:ea typeface="맑은 고딕"/>
+                <a:cs typeface="맑은 고딕"/>
               </a:rPr>
               <a:t>VM 실습</a:t>
             </a:r>
@@ -8569,6 +8671,8 @@
                   <a:srgbClr val="222733"/>
                 </a:solidFill>
                 <a:latin typeface="맑은 고딕"/>
+                <a:ea typeface="맑은 고딕"/>
+                <a:cs typeface="맑은 고딕"/>
               </a:rPr>
               <a:t>자가치유 라이브 검증</a:t>
             </a:r>
@@ -8648,6 +8752,8 @@
                   <a:srgbClr val="FFFFFF"/>
                 </a:solidFill>
                 <a:latin typeface="맑은 고딕"/>
+                <a:ea typeface="맑은 고딕"/>
+                <a:cs typeface="맑은 고딕"/>
               </a:rPr>
               <a:t>3</a:t>
             </a:r>
@@ -8731,6 +8837,8 @@
                   <a:srgbClr val="14213D"/>
                 </a:solidFill>
                 <a:latin typeface="맑은 고딕"/>
+                <a:ea typeface="맑은 고딕"/>
+                <a:cs typeface="맑은 고딕"/>
               </a:rPr>
               <a:t>전체 회고</a:t>
             </a:r>
@@ -8770,6 +8878,8 @@
                   <a:srgbClr val="222733"/>
                 </a:solidFill>
                 <a:latin typeface="맑은 고딕"/>
+                <a:ea typeface="맑은 고딕"/>
+                <a:cs typeface="맑은 고딕"/>
               </a:rPr>
               <a:t>0~14주 되돌아보기</a:t>
             </a:r>
@@ -8805,6 +8915,8 @@
                   <a:srgbClr val="5B6373"/>
                 </a:solidFill>
                 <a:latin typeface="맑은 고딕"/>
+                <a:ea typeface="맑은 고딕"/>
+                <a:cs typeface="맑은 고딕"/>
               </a:rPr>
               <a:t>클라우드인프라관리  ·  14주차 3차시 [VM 전용]</a:t>
             </a:r>
@@ -8840,6 +8952,8 @@
                   <a:srgbClr val="5B6373"/>
                 </a:solidFill>
                 <a:latin typeface="맑은 고딕"/>
+                <a:ea typeface="맑은 고딕"/>
+                <a:cs typeface="맑은 고딕"/>
               </a:rPr>
               <a:t>03 / 13</a:t>
             </a:r>
@@ -9043,6 +9157,8 @@
                   <a:srgbClr val="14213D"/>
                 </a:solidFill>
                 <a:latin typeface="맑은 고딕"/>
+                <a:ea typeface="맑은 고딕"/>
+                <a:cs typeface="맑은 고딕"/>
               </a:rPr>
               <a:t>PART 01</a:t>
             </a:r>
@@ -9078,6 +9194,8 @@
                   <a:srgbClr val="FFFFFF"/>
                 </a:solidFill>
                 <a:latin typeface="맑은 고딕"/>
+                <a:ea typeface="맑은 고딕"/>
+                <a:cs typeface="맑은 고딕"/>
               </a:rPr>
               <a:t>Scale-out과 자가치유, 함께 보면</a:t>
             </a:r>
@@ -9113,6 +9231,8 @@
                   <a:srgbClr val="C9D3E6"/>
                 </a:solidFill>
                 <a:latin typeface="맑은 고딕"/>
+                <a:ea typeface="맑은 고딕"/>
+                <a:cs typeface="맑은 고딕"/>
               </a:rPr>
               <a:t>고가용성이 완성되는 순간</a:t>
             </a:r>
@@ -9272,6 +9392,8 @@
                   <a:srgbClr val="14213D"/>
                 </a:solidFill>
                 <a:latin typeface="맑은 고딕"/>
+                <a:ea typeface="맑은 고딕"/>
+                <a:cs typeface="맑은 고딕"/>
               </a:rPr>
               <a:t>01</a:t>
             </a:r>
@@ -9307,6 +9429,8 @@
                   <a:srgbClr val="14B8A6"/>
                 </a:solidFill>
                 <a:latin typeface="맑은 고딕"/>
+                <a:ea typeface="맑은 고딕"/>
+                <a:cs typeface="맑은 고딕"/>
               </a:rPr>
               <a:t>PART 1 · 고가용성</a:t>
             </a:r>
@@ -9342,6 +9466,8 @@
                   <a:srgbClr val="FFFFFF"/>
                 </a:solidFill>
                 <a:latin typeface="맑은 고딕"/>
+                <a:ea typeface="맑은 고딕"/>
+                <a:cs typeface="맑은 고딕"/>
               </a:rPr>
               <a:t>두 가지 능력이 합쳐지면</a:t>
             </a:r>
@@ -9381,6 +9507,8 @@
                   <a:srgbClr val="0D9488"/>
                 </a:solidFill>
                 <a:latin typeface="맑은 고딕"/>
+                <a:ea typeface="맑은 고딕"/>
+                <a:cs typeface="맑은 고딕"/>
               </a:rPr>
               <a:t>●  </a:t>
             </a:r>
@@ -9390,6 +9518,8 @@
                   <a:srgbClr val="222733"/>
                 </a:solidFill>
                 <a:latin typeface="맑은 고딕"/>
+                <a:ea typeface="맑은 고딕"/>
+                <a:cs typeface="맑은 고딕"/>
               </a:rPr>
               <a:t>Scale-out(HPA) — 트래픽이 몰리면 Pod 수를 늘려 부하를 분산(14주차 2차시)</a:t>
             </a:r>
@@ -9406,6 +9536,8 @@
                   <a:srgbClr val="0D9488"/>
                 </a:solidFill>
                 <a:latin typeface="맑은 고딕"/>
+                <a:ea typeface="맑은 고딕"/>
+                <a:cs typeface="맑은 고딕"/>
               </a:rPr>
               <a:t>●  </a:t>
             </a:r>
@@ -9415,6 +9547,8 @@
                   <a:srgbClr val="222733"/>
                 </a:solidFill>
                 <a:latin typeface="맑은 고딕"/>
+                <a:ea typeface="맑은 고딕"/>
+                <a:cs typeface="맑은 고딕"/>
               </a:rPr>
               <a:t>자가치유(Self-Healing) — Pod가 죽으면 즉시 새로 만들어 개수를 유지(7주차)</a:t>
             </a:r>
@@ -9431,6 +9565,8 @@
                   <a:srgbClr val="0D9488"/>
                 </a:solidFill>
                 <a:latin typeface="맑은 고딕"/>
+                <a:ea typeface="맑은 고딕"/>
+                <a:cs typeface="맑은 고딕"/>
               </a:rPr>
               <a:t>●  </a:t>
             </a:r>
@@ -9440,6 +9576,8 @@
                   <a:srgbClr val="222733"/>
                 </a:solidFill>
                 <a:latin typeface="맑은 고딕"/>
+                <a:ea typeface="맑은 고딕"/>
+                <a:cs typeface="맑은 고딕"/>
               </a:rPr>
               <a:t>이 둘이 함께 있으면, '트래픽 폭주'와 '장애' 두 가지 위기 모두에서 서비스가 스스로 살아남음</a:t>
             </a:r>
@@ -9475,6 +9613,8 @@
                   <a:srgbClr val="14213D"/>
                 </a:solidFill>
                 <a:latin typeface="맑은 고딕"/>
+                <a:ea typeface="맑은 고딕"/>
+                <a:cs typeface="맑은 고딕"/>
               </a:rPr>
               <a:t>고가용성의 두 축</a:t>
             </a:r>
@@ -9554,6 +9694,8 @@
                   <a:srgbClr val="FFFFFF"/>
                 </a:solidFill>
                 <a:latin typeface="맑은 고딕"/>
+                <a:ea typeface="맑은 고딕"/>
+                <a:cs typeface="맑은 고딕"/>
               </a:rPr>
               <a:t>트래픽 폭주 → HPA가 Pod 증설</a:t>
             </a:r>
@@ -9633,6 +9775,8 @@
                   <a:srgbClr val="FFFFFF"/>
                 </a:solidFill>
                 <a:latin typeface="맑은 고딕"/>
+                <a:ea typeface="맑은 고딕"/>
+                <a:cs typeface="맑은 고딕"/>
               </a:rPr>
               <a:t>장애 발생(Pod Kill) → 자가치유가 즉시 복구</a:t>
             </a:r>
@@ -9668,6 +9812,8 @@
                   <a:srgbClr val="5B6373"/>
                 </a:solidFill>
                 <a:latin typeface="맑은 고딕"/>
+                <a:ea typeface="맑은 고딕"/>
+                <a:cs typeface="맑은 고딕"/>
               </a:rPr>
               <a:t>클라우드인프라관리  ·  14주차 3차시 [VM 전용]</a:t>
             </a:r>
@@ -9703,6 +9849,8 @@
                   <a:srgbClr val="5B6373"/>
                 </a:solidFill>
                 <a:latin typeface="맑은 고딕"/>
+                <a:ea typeface="맑은 고딕"/>
+                <a:cs typeface="맑은 고딕"/>
               </a:rPr>
               <a:t>05 / 13</a:t>
             </a:r>
@@ -9906,6 +10054,8 @@
                   <a:srgbClr val="14213D"/>
                 </a:solidFill>
                 <a:latin typeface="맑은 고딕"/>
+                <a:ea typeface="맑은 고딕"/>
+                <a:cs typeface="맑은 고딕"/>
               </a:rPr>
               <a:t>01</a:t>
             </a:r>
@@ -9941,6 +10091,8 @@
                   <a:srgbClr val="14B8A6"/>
                 </a:solidFill>
                 <a:latin typeface="맑은 고딕"/>
+                <a:ea typeface="맑은 고딕"/>
+                <a:cs typeface="맑은 고딕"/>
               </a:rPr>
               <a:t>PART 1 · 고가용성</a:t>
             </a:r>
@@ -9976,6 +10128,8 @@
                   <a:srgbClr val="FFFFFF"/>
                 </a:solidFill>
                 <a:latin typeface="맑은 고딕"/>
+                <a:ea typeface="맑은 고딕"/>
+                <a:cs typeface="맑은 고딕"/>
               </a:rPr>
               <a:t>오늘 검증할 시나리오</a:t>
             </a:r>
@@ -10015,6 +10169,8 @@
                   <a:srgbClr val="0D9488"/>
                 </a:solidFill>
                 <a:latin typeface="맑은 고딕"/>
+                <a:ea typeface="맑은 고딕"/>
+                <a:cs typeface="맑은 고딕"/>
               </a:rPr>
               <a:t>●  </a:t>
             </a:r>
@@ -10024,6 +10180,8 @@
                   <a:srgbClr val="222733"/>
                 </a:solidFill>
                 <a:latin typeface="맑은 고딕"/>
+                <a:ea typeface="맑은 고딕"/>
+                <a:cs typeface="맑은 고딕"/>
               </a:rPr>
               <a:t>부하가 걸려 Pod가 여러 개로 늘어난 상태에서, 그중 하나를 강제로 kubectl delete pod</a:t>
             </a:r>
@@ -10040,6 +10198,8 @@
                   <a:srgbClr val="0D9488"/>
                 </a:solidFill>
                 <a:latin typeface="맑은 고딕"/>
+                <a:ea typeface="맑은 고딕"/>
+                <a:cs typeface="맑은 고딕"/>
               </a:rPr>
               <a:t>●  </a:t>
             </a:r>
@@ -10049,6 +10209,8 @@
                   <a:srgbClr val="222733"/>
                 </a:solidFill>
                 <a:latin typeface="맑은 고딕"/>
+                <a:ea typeface="맑은 고딕"/>
+                <a:cs typeface="맑은 고딕"/>
               </a:rPr>
               <a:t>Deployment가 즉시 그 자리를 새 Pod로 채우는지 확인(7주차에 배운 원리 그대로)</a:t>
             </a:r>
@@ -10065,6 +10227,8 @@
                   <a:srgbClr val="0D9488"/>
                 </a:solidFill>
                 <a:latin typeface="맑은 고딕"/>
+                <a:ea typeface="맑은 고딕"/>
+                <a:cs typeface="맑은 고딕"/>
               </a:rPr>
               <a:t>●  </a:t>
             </a:r>
@@ -10074,6 +10238,8 @@
                   <a:srgbClr val="222733"/>
                 </a:solidFill>
                 <a:latin typeface="맑은 고딕"/>
+                <a:ea typeface="맑은 고딕"/>
+                <a:cs typeface="맑은 고딕"/>
               </a:rPr>
               <a:t>이 과정 동안 서비스(curl 응답)가 완전히 끊기지 않는지도 함께 관찰</a:t>
             </a:r>
@@ -10153,6 +10319,8 @@
                   <a:srgbClr val="FFFFFF"/>
                 </a:solidFill>
                 <a:latin typeface="맑은 고딕"/>
+                <a:ea typeface="맑은 고딕"/>
+                <a:cs typeface="맑은 고딕"/>
               </a:rPr>
               <a:t>🔗  7주차 연결</a:t>
             </a:r>
@@ -10188,6 +10356,8 @@
                   <a:srgbClr val="FFFFFF"/>
                 </a:solidFill>
                 <a:latin typeface="맑은 고딕"/>
+                <a:ea typeface="맑은 고딕"/>
+                <a:cs typeface="맑은 고딕"/>
               </a:rPr>
               <a:t>7주차에 배운 자가치유가, 오늘은 '부하가 걸린 실전 상황'에서도 그대로 작동하는지 검증합니다</a:t>
             </a:r>
@@ -10223,6 +10393,8 @@
                   <a:srgbClr val="5B6373"/>
                 </a:solidFill>
                 <a:latin typeface="맑은 고딕"/>
+                <a:ea typeface="맑은 고딕"/>
+                <a:cs typeface="맑은 고딕"/>
               </a:rPr>
               <a:t>클라우드인프라관리  ·  14주차 3차시 [VM 전용]</a:t>
             </a:r>
@@ -10258,6 +10430,8 @@
                   <a:srgbClr val="5B6373"/>
                 </a:solidFill>
                 <a:latin typeface="맑은 고딕"/>
+                <a:ea typeface="맑은 고딕"/>
+                <a:cs typeface="맑은 고딕"/>
               </a:rPr>
               <a:t>06 / 13</a:t>
             </a:r>
@@ -10461,6 +10635,8 @@
                   <a:srgbClr val="14213D"/>
                 </a:solidFill>
                 <a:latin typeface="맑은 고딕"/>
+                <a:ea typeface="맑은 고딕"/>
+                <a:cs typeface="맑은 고딕"/>
               </a:rPr>
               <a:t>PART 02</a:t>
             </a:r>
@@ -10496,6 +10672,8 @@
                   <a:srgbClr val="FFFFFF"/>
                 </a:solidFill>
                 <a:latin typeface="맑은 고딕"/>
+                <a:ea typeface="맑은 고딕"/>
+                <a:cs typeface="맑은 고딕"/>
               </a:rPr>
               <a:t>실습 안내</a:t>
             </a:r>
@@ -10531,6 +10709,8 @@
                   <a:srgbClr val="C9D3E6"/>
                 </a:solidFill>
                 <a:latin typeface="맑은 고딕"/>
+                <a:ea typeface="맑은 고딕"/>
+                <a:cs typeface="맑은 고딕"/>
               </a:rPr>
               <a:t>부하 속에서 Pod를 죽여본다</a:t>
             </a:r>
@@ -10690,6 +10870,8 @@
                   <a:srgbClr val="14213D"/>
                 </a:solidFill>
                 <a:latin typeface="맑은 고딕"/>
+                <a:ea typeface="맑은 고딕"/>
+                <a:cs typeface="맑은 고딕"/>
               </a:rPr>
               <a:t>02</a:t>
             </a:r>
@@ -10725,6 +10907,8 @@
                   <a:srgbClr val="14B8A6"/>
                 </a:solidFill>
                 <a:latin typeface="맑은 고딕"/>
+                <a:ea typeface="맑은 고딕"/>
+                <a:cs typeface="맑은 고딕"/>
               </a:rPr>
               <a:t>PART 2 · 실습 안내</a:t>
             </a:r>
@@ -10760,6 +10944,8 @@
                   <a:srgbClr val="FFFFFF"/>
                 </a:solidFill>
                 <a:latin typeface="맑은 고딕"/>
+                <a:ea typeface="맑은 고딕"/>
+                <a:cs typeface="맑은 고딕"/>
               </a:rPr>
               <a:t>VM 실습 — 자가치유 라이브 검증</a:t>
             </a:r>
@@ -10799,6 +10985,8 @@
                   <a:srgbClr val="0D9488"/>
                 </a:solidFill>
                 <a:latin typeface="맑은 고딕"/>
+                <a:ea typeface="맑은 고딕"/>
+                <a:cs typeface="맑은 고딕"/>
               </a:rPr>
               <a:t>●  </a:t>
             </a:r>
@@ -10808,6 +10996,8 @@
                   <a:srgbClr val="222733"/>
                 </a:solidFill>
                 <a:latin typeface="맑은 고딕"/>
+                <a:ea typeface="맑은 고딕"/>
+                <a:cs typeface="맑은 고딕"/>
               </a:rPr>
               <a:t>ab로 다시 한번 부하를 걸어 Pod가 여러 개인 상태를 만듦(2차시 참고)</a:t>
             </a:r>
@@ -10824,6 +11014,8 @@
                   <a:srgbClr val="0D9488"/>
                 </a:solidFill>
                 <a:latin typeface="맑은 고딕"/>
+                <a:ea typeface="맑은 고딕"/>
+                <a:cs typeface="맑은 고딕"/>
               </a:rPr>
               <a:t>●  </a:t>
             </a:r>
@@ -10833,6 +11025,8 @@
                   <a:srgbClr val="222733"/>
                 </a:solidFill>
                 <a:latin typeface="맑은 고딕"/>
+                <a:ea typeface="맑은 고딕"/>
+                <a:cs typeface="맑은 고딕"/>
               </a:rPr>
               <a:t>kubectl get pods 로 현재 떠 있는 chatbot Pod 이름 하나 확인</a:t>
             </a:r>
@@ -10849,6 +11043,8 @@
                   <a:srgbClr val="0D9488"/>
                 </a:solidFill>
                 <a:latin typeface="맑은 고딕"/>
+                <a:ea typeface="맑은 고딕"/>
+                <a:cs typeface="맑은 고딕"/>
               </a:rPr>
               <a:t>●  </a:t>
             </a:r>
@@ -10858,6 +11054,8 @@
                   <a:srgbClr val="222733"/>
                 </a:solidFill>
                 <a:latin typeface="맑은 고딕"/>
+                <a:ea typeface="맑은 고딕"/>
+                <a:cs typeface="맑은 고딕"/>
               </a:rPr>
               <a:t>kubectl delete pod {파드이름} 로 강제 삭제</a:t>
             </a:r>
@@ -10874,6 +11072,8 @@
                   <a:srgbClr val="0D9488"/>
                 </a:solidFill>
                 <a:latin typeface="맑은 고딕"/>
+                <a:ea typeface="맑은 고딕"/>
+                <a:cs typeface="맑은 고딕"/>
               </a:rPr>
               <a:t>●  </a:t>
             </a:r>
@@ -10883,6 +11083,8 @@
                   <a:srgbClr val="222733"/>
                 </a:solidFill>
                 <a:latin typeface="맑은 고딕"/>
+                <a:ea typeface="맑은 고딕"/>
+                <a:cs typeface="맑은 고딕"/>
               </a:rPr>
               <a:t>kubectl get pods -w 로 삭제된 Pod 대신 새 Pod가 즉시 생성되는 과정 관찰</a:t>
             </a:r>
@@ -10918,6 +11120,8 @@
                   <a:srgbClr val="5B6373"/>
                 </a:solidFill>
                 <a:latin typeface="맑은 고딕"/>
+                <a:ea typeface="맑은 고딕"/>
+                <a:cs typeface="맑은 고딕"/>
               </a:rPr>
               <a:t>클라우드인프라관리  ·  14주차 3차시 [VM 전용]</a:t>
             </a:r>
@@ -10953,6 +11157,8 @@
                   <a:srgbClr val="5B6373"/>
                 </a:solidFill>
                 <a:latin typeface="맑은 고딕"/>
+                <a:ea typeface="맑은 고딕"/>
+                <a:cs typeface="맑은 고딕"/>
               </a:rPr>
               <a:t>08 / 13</a:t>
             </a:r>
@@ -11156,6 +11362,8 @@
                   <a:srgbClr val="14213D"/>
                 </a:solidFill>
                 <a:latin typeface="맑은 고딕"/>
+                <a:ea typeface="맑은 고딕"/>
+                <a:cs typeface="맑은 고딕"/>
               </a:rPr>
               <a:t>02</a:t>
             </a:r>
@@ -11191,6 +11399,8 @@
                   <a:srgbClr val="14B8A6"/>
                 </a:solidFill>
                 <a:latin typeface="맑은 고딕"/>
+                <a:ea typeface="맑은 고딕"/>
+                <a:cs typeface="맑은 고딕"/>
               </a:rPr>
               <a:t>PART 2 · 실습 안내</a:t>
             </a:r>
@@ -11226,6 +11436,8 @@
                   <a:srgbClr val="FFFFFF"/>
                 </a:solidFill>
                 <a:latin typeface="맑은 고딕"/>
+                <a:ea typeface="맑은 고딕"/>
+                <a:cs typeface="맑은 고딕"/>
               </a:rPr>
               <a:t>결과 정리 및 14주차 종합 제출</a:t>
             </a:r>
@@ -11265,6 +11477,8 @@
                   <a:srgbClr val="0D9488"/>
                 </a:solidFill>
                 <a:latin typeface="맑은 고딕"/>
+                <a:ea typeface="맑은 고딕"/>
+                <a:cs typeface="맑은 고딕"/>
               </a:rPr>
               <a:t>●  </a:t>
             </a:r>
@@ -11274,6 +11488,8 @@
                   <a:srgbClr val="222733"/>
                 </a:solidFill>
                 <a:latin typeface="맑은 고딕"/>
+                <a:ea typeface="맑은 고딕"/>
+                <a:cs typeface="맑은 고딕"/>
               </a:rPr>
               <a:t>Pod 삭제 직후 kubectl get pods -w 화면(Terminating→새 Pod 생성) 캡처</a:t>
             </a:r>
@@ -11290,6 +11506,8 @@
                   <a:srgbClr val="0D9488"/>
                 </a:solidFill>
                 <a:latin typeface="맑은 고딕"/>
+                <a:ea typeface="맑은 고딕"/>
+                <a:cs typeface="맑은 고딕"/>
               </a:rPr>
               <a:t>●  </a:t>
             </a:r>
@@ -11299,6 +11517,8 @@
                   <a:srgbClr val="222733"/>
                 </a:solidFill>
                 <a:latin typeface="맑은 고딕"/>
+                <a:ea typeface="맑은 고딕"/>
+                <a:cs typeface="맑은 고딕"/>
               </a:rPr>
               <a:t>삭제 도중 curl $(minikube service chatbot --url) 실행 결과 캡처(서비스 지속 확인)</a:t>
             </a:r>
@@ -11315,6 +11535,8 @@
                   <a:srgbClr val="0D9488"/>
                 </a:solidFill>
                 <a:latin typeface="맑은 고딕"/>
+                <a:ea typeface="맑은 고딕"/>
+                <a:cs typeface="맑은 고딕"/>
               </a:rPr>
               <a:t>●  </a:t>
             </a:r>
@@ -11324,6 +11546,8 @@
                   <a:srgbClr val="222733"/>
                 </a:solidFill>
                 <a:latin typeface="맑은 고딕"/>
+                <a:ea typeface="맑은 고딕"/>
+                <a:cs typeface="맑은 고딕"/>
               </a:rPr>
               <a:t>14주차 1~3차시(HPA 설정·부하테스트·자가치유) 실습을 종합해서 제출</a:t>
             </a:r>
@@ -11359,6 +11583,8 @@
                   <a:srgbClr val="5B6373"/>
                 </a:solidFill>
                 <a:latin typeface="맑은 고딕"/>
+                <a:ea typeface="맑은 고딕"/>
+                <a:cs typeface="맑은 고딕"/>
               </a:rPr>
               <a:t>클라우드인프라관리  ·  14주차 3차시 [VM 전용]</a:t>
             </a:r>
@@ -11394,6 +11620,8 @@
                   <a:srgbClr val="5B6373"/>
                 </a:solidFill>
                 <a:latin typeface="맑은 고딕"/>
+                <a:ea typeface="맑은 고딕"/>
+                <a:cs typeface="맑은 고딕"/>
               </a:rPr>
               <a:t>09 / 13</a:t>
             </a:r>
